--- a/examples/repositories/cyberppt/pages/slide-04.pptx
+++ b/examples/repositories/cyberppt/pages/slide-04.pptx
@@ -883,7 +883,7 @@
         </p:nvSpPr>
         <p:spPr>
           <a:xfrm>
-            <a:off x="357293" y="138472"/>
+            <a:off x="350001" y="145760"/>
             <a:ext cx="444793" cy="364400"/>
           </a:xfrm>
           <a:prstGeom prst="rect">
@@ -945,7 +945,7 @@
         </p:nvSpPr>
         <p:spPr>
           <a:xfrm>
-            <a:off x="357293" y="590327"/>
+            <a:off x="350001" y="583039"/>
             <a:ext cx="11484402" cy="612191"/>
           </a:xfrm>
           <a:prstGeom prst="rect">
@@ -984,7 +984,7 @@
         </p:nvSpPr>
         <p:spPr>
           <a:xfrm>
-            <a:off x="357293" y="1268111"/>
+            <a:off x="364584" y="1253535"/>
             <a:ext cx="11302110" cy="371688"/>
           </a:xfrm>
           <a:prstGeom prst="rect">
@@ -1374,7 +1374,7 @@
         </p:nvSpPr>
         <p:spPr>
           <a:xfrm>
-            <a:off x="1378128" y="2543509"/>
+            <a:off x="1400003" y="2528933"/>
             <a:ext cx="2048963" cy="714223"/>
           </a:xfrm>
           <a:prstGeom prst="rect">
@@ -1413,7 +1413,7 @@
         </p:nvSpPr>
         <p:spPr>
           <a:xfrm>
-            <a:off x="3864592" y="2543509"/>
+            <a:off x="3915634" y="2550797"/>
             <a:ext cx="3500008" cy="714223"/>
           </a:xfrm>
           <a:prstGeom prst="rect">
@@ -1430,7 +1430,7 @@
               <a:buNone/>
             </a:pPr>
             <a:r>
-              <a:rPr lang="en-US" sz="2000" dirty="0">
+              <a:rPr lang="en-US" sz="2000" b="1" dirty="0">
                 <a:solidFill>
                   <a:srgbClr val="161616"/>
                 </a:solidFill>
@@ -1452,7 +1452,7 @@
         </p:nvSpPr>
         <p:spPr>
           <a:xfrm>
-            <a:off x="7802102" y="2543509"/>
+            <a:off x="7845852" y="2550797"/>
             <a:ext cx="3886467" cy="714223"/>
           </a:xfrm>
           <a:prstGeom prst="rect">
@@ -1469,7 +1469,7 @@
               <a:buNone/>
             </a:pPr>
             <a:r>
-              <a:rPr lang="en-US" sz="2000" dirty="0">
+              <a:rPr lang="en-US" sz="2000" b="1" dirty="0">
                 <a:solidFill>
                   <a:srgbClr val="161616"/>
                 </a:solidFill>
@@ -1581,7 +1581,7 @@
         </p:nvSpPr>
         <p:spPr>
           <a:xfrm>
-            <a:off x="1378128" y="3549252"/>
+            <a:off x="1400003" y="3549252"/>
             <a:ext cx="2048963" cy="714223"/>
           </a:xfrm>
           <a:prstGeom prst="rect">
@@ -1620,7 +1620,7 @@
         </p:nvSpPr>
         <p:spPr>
           <a:xfrm>
-            <a:off x="3864592" y="3549252"/>
+            <a:off x="3915634" y="3563828"/>
             <a:ext cx="3500008" cy="714223"/>
           </a:xfrm>
           <a:prstGeom prst="rect">
@@ -1637,7 +1637,7 @@
               <a:buNone/>
             </a:pPr>
             <a:r>
-              <a:rPr lang="en-US" sz="2000" dirty="0">
+              <a:rPr lang="en-US" sz="2000" b="1" dirty="0">
                 <a:solidFill>
                   <a:srgbClr val="161616"/>
                 </a:solidFill>
@@ -1659,7 +1659,7 @@
         </p:nvSpPr>
         <p:spPr>
           <a:xfrm>
-            <a:off x="7802102" y="3549252"/>
+            <a:off x="7853143" y="3556540"/>
             <a:ext cx="3886467" cy="714223"/>
           </a:xfrm>
           <a:prstGeom prst="rect">
@@ -1676,7 +1676,7 @@
               <a:buNone/>
             </a:pPr>
             <a:r>
-              <a:rPr lang="en-US" sz="2000" dirty="0">
+              <a:rPr lang="en-US" sz="2000" b="1" dirty="0">
                 <a:solidFill>
                   <a:srgbClr val="161616"/>
                 </a:solidFill>
@@ -1788,7 +1788,7 @@
         </p:nvSpPr>
         <p:spPr>
           <a:xfrm>
-            <a:off x="1378128" y="4554995"/>
+            <a:off x="1400003" y="4562283"/>
             <a:ext cx="2048963" cy="736087"/>
           </a:xfrm>
           <a:prstGeom prst="rect">
@@ -1827,7 +1827,7 @@
         </p:nvSpPr>
         <p:spPr>
           <a:xfrm>
-            <a:off x="3864592" y="4554995"/>
+            <a:off x="3915634" y="4576859"/>
             <a:ext cx="3500008" cy="736087"/>
           </a:xfrm>
           <a:prstGeom prst="rect">
@@ -1844,7 +1844,7 @@
               <a:buNone/>
             </a:pPr>
             <a:r>
-              <a:rPr lang="en-US" sz="2000" dirty="0">
+              <a:rPr lang="en-US" sz="2000" b="1" dirty="0">
                 <a:solidFill>
                   <a:srgbClr val="161616"/>
                 </a:solidFill>
@@ -1866,7 +1866,7 @@
         </p:nvSpPr>
         <p:spPr>
           <a:xfrm>
-            <a:off x="7802102" y="4554995"/>
+            <a:off x="7853143" y="4576859"/>
             <a:ext cx="3886467" cy="736087"/>
           </a:xfrm>
           <a:prstGeom prst="rect">
@@ -1883,7 +1883,7 @@
               <a:buNone/>
             </a:pPr>
             <a:r>
-              <a:rPr lang="en-US" sz="2000" dirty="0">
+              <a:rPr lang="en-US" sz="2000" b="1" dirty="0">
                 <a:solidFill>
                   <a:srgbClr val="161616"/>
                 </a:solidFill>
@@ -2072,8 +2072,8 @@
         </p:nvSpPr>
         <p:spPr>
           <a:xfrm>
-            <a:off x="9391689" y="6515464"/>
-            <a:ext cx="2471881" cy="196776"/>
+            <a:off x="291667" y="6559192"/>
+            <a:ext cx="11608361" cy="189488"/>
           </a:xfrm>
           <a:prstGeom prst="rect">
             <a:avLst/>
@@ -2089,9 +2089,9 @@
               <a:buNone/>
             </a:pPr>
             <a:r>
-              <a:rPr lang="en-US" sz="800" dirty="0">
+              <a:rPr lang="en-US" sz="1100" dirty="0">
                 <a:solidFill>
-                  <a:srgbClr val="161616"/>
+                  <a:srgbClr val="514B44"/>
                 </a:solidFill>
                 <a:latin typeface="Yu Gothic" pitchFamily="34" charset="0"/>
                 <a:ea typeface="Yu Gothic" pitchFamily="34" charset="-122"/>
@@ -2099,7 +2099,7 @@
               </a:rPr>
               <a:t>架空の企画例。担当体制は提案であり未合意。</a:t>
             </a:r>
-            <a:endParaRPr lang="en-US" sz="800" dirty="0"/>
+            <a:endParaRPr lang="en-US" sz="1100" dirty="0"/>
           </a:p>
         </p:txBody>
       </p:sp>
